--- a/발표/20260805_밭보다_본선발표_v7.pptx
+++ b/발표/20260805_밭보다_본선발표_v7.pptx
@@ -2111,27 +2111,27 @@
         <p:spPr>
           <a:xfrm>
             <a:off x="0" y="0"/>
-            <a:ext cx="12923197" cy="2304288"/>
+            <a:ext cx="12923197" cy="7269480"/>
           </a:xfrm>
           <a:prstGeom prst="rect">
             <a:avLst/>
           </a:prstGeom>
           <a:gradFill>
             <a:gsLst>
-              <a:gs pos="86000">
+              <a:gs pos="24000">
                 <a:schemeClr val="accent1">
                   <a:lumMod val="5000"/>
                   <a:lumOff val="95000"/>
                   <a:alpha val="13000"/>
                 </a:schemeClr>
               </a:gs>
-              <a:gs pos="16000">
+              <a:gs pos="0">
                 <a:schemeClr val="accent1">
                   <a:lumMod val="0"/>
                   <a:lumOff val="100000"/>
                 </a:schemeClr>
               </a:gs>
-              <a:gs pos="35000">
+              <a:gs pos="0">
                 <a:schemeClr val="accent1">
                   <a:lumMod val="0"/>
                   <a:lumOff val="100000"/>
@@ -2141,9 +2141,7 @@
             <a:lin ang="5400000" scaled="1"/>
           </a:gradFill>
           <a:ln w="12700">
-            <a:solidFill>
-              <a:srgbClr val="FFFFFF"/>
-            </a:solidFill>
+            <a:noFill/>
             <a:prstDash val="solid"/>
           </a:ln>
         </p:spPr>
@@ -2163,7 +2161,7 @@
         </p:nvSpPr>
         <p:spPr>
           <a:xfrm>
-            <a:off x="6083503" y="2761488"/>
+            <a:off x="6820103" y="3364992"/>
             <a:ext cx="2670048" cy="1481328"/>
           </a:xfrm>
           <a:prstGeom prst="roundRect">
@@ -2197,7 +2195,7 @@
         </p:nvSpPr>
         <p:spPr>
           <a:xfrm>
-            <a:off x="6229807" y="2999232"/>
+            <a:off x="6966407" y="3602736"/>
             <a:ext cx="2377440" cy="420624"/>
           </a:xfrm>
           <a:prstGeom prst="rect">
@@ -2236,7 +2234,7 @@
         </p:nvSpPr>
         <p:spPr>
           <a:xfrm>
-            <a:off x="6229807" y="3474720"/>
+            <a:off x="6966407" y="4078224"/>
             <a:ext cx="2377440" cy="256032"/>
           </a:xfrm>
           <a:prstGeom prst="rect">
@@ -2275,7 +2273,7 @@
         </p:nvSpPr>
         <p:spPr>
           <a:xfrm>
-            <a:off x="6229807" y="3730752"/>
+            <a:off x="6966407" y="4334256"/>
             <a:ext cx="2377440" cy="292608"/>
           </a:xfrm>
           <a:prstGeom prst="rect">
@@ -2314,7 +2312,7 @@
         </p:nvSpPr>
         <p:spPr>
           <a:xfrm>
-            <a:off x="8954719" y="2761488"/>
+            <a:off x="9691319" y="3364992"/>
             <a:ext cx="2670048" cy="1481328"/>
           </a:xfrm>
           <a:prstGeom prst="roundRect">
@@ -2348,7 +2346,7 @@
         </p:nvSpPr>
         <p:spPr>
           <a:xfrm>
-            <a:off x="9101023" y="2999232"/>
+            <a:off x="9837623" y="3602736"/>
             <a:ext cx="2377440" cy="420624"/>
           </a:xfrm>
           <a:prstGeom prst="rect">
@@ -2387,7 +2385,7 @@
         </p:nvSpPr>
         <p:spPr>
           <a:xfrm>
-            <a:off x="9101023" y="3474720"/>
+            <a:off x="9837623" y="4078224"/>
             <a:ext cx="2377440" cy="256032"/>
           </a:xfrm>
           <a:prstGeom prst="rect">
@@ -2426,7 +2424,7 @@
         </p:nvSpPr>
         <p:spPr>
           <a:xfrm>
-            <a:off x="9101023" y="3730752"/>
+            <a:off x="9837623" y="4334256"/>
             <a:ext cx="2377440" cy="292608"/>
           </a:xfrm>
           <a:prstGeom prst="rect">
@@ -2465,7 +2463,7 @@
         </p:nvSpPr>
         <p:spPr>
           <a:xfrm>
-            <a:off x="6083503" y="4480560"/>
+            <a:off x="6820103" y="5084064"/>
             <a:ext cx="2670048" cy="1481328"/>
           </a:xfrm>
           <a:prstGeom prst="roundRect">
@@ -2499,7 +2497,7 @@
         </p:nvSpPr>
         <p:spPr>
           <a:xfrm>
-            <a:off x="6229807" y="4718304"/>
+            <a:off x="6966407" y="5321808"/>
             <a:ext cx="2377440" cy="420624"/>
           </a:xfrm>
           <a:prstGeom prst="rect">
@@ -2538,7 +2536,7 @@
         </p:nvSpPr>
         <p:spPr>
           <a:xfrm>
-            <a:off x="6229807" y="5193792"/>
+            <a:off x="6966407" y="5797296"/>
             <a:ext cx="2377440" cy="256032"/>
           </a:xfrm>
           <a:prstGeom prst="rect">
@@ -2577,7 +2575,7 @@
         </p:nvSpPr>
         <p:spPr>
           <a:xfrm>
-            <a:off x="6229807" y="5449824"/>
+            <a:off x="6966407" y="6053328"/>
             <a:ext cx="2377440" cy="292608"/>
           </a:xfrm>
           <a:prstGeom prst="rect">
@@ -2616,7 +2614,7 @@
         </p:nvSpPr>
         <p:spPr>
           <a:xfrm>
-            <a:off x="8954719" y="4480560"/>
+            <a:off x="9691319" y="5084064"/>
             <a:ext cx="2670048" cy="1481328"/>
           </a:xfrm>
           <a:prstGeom prst="roundRect">
@@ -2650,7 +2648,7 @@
         </p:nvSpPr>
         <p:spPr>
           <a:xfrm>
-            <a:off x="9101023" y="4718304"/>
+            <a:off x="9837623" y="5321808"/>
             <a:ext cx="2377440" cy="420624"/>
           </a:xfrm>
           <a:prstGeom prst="rect">
@@ -2689,7 +2687,7 @@
         </p:nvSpPr>
         <p:spPr>
           <a:xfrm>
-            <a:off x="9101023" y="5193792"/>
+            <a:off x="9837623" y="5797296"/>
             <a:ext cx="2377440" cy="256032"/>
           </a:xfrm>
           <a:prstGeom prst="rect">
@@ -2728,7 +2726,7 @@
         </p:nvSpPr>
         <p:spPr>
           <a:xfrm>
-            <a:off x="9101023" y="5449824"/>
+            <a:off x="9837623" y="6053328"/>
             <a:ext cx="2377440" cy="292608"/>
           </a:xfrm>
           <a:prstGeom prst="rect">
@@ -6274,8 +6272,8 @@
         </p:nvSpPr>
         <p:spPr>
           <a:xfrm>
-            <a:off x="566928" y="2157984"/>
-            <a:ext cx="4224528" cy="896112"/>
+            <a:off x="566927" y="2157984"/>
+            <a:ext cx="4936405" cy="896112"/>
           </a:xfrm>
           <a:prstGeom prst="roundRect">
             <a:avLst>
@@ -6426,7 +6424,7 @@
         <p:spPr>
           <a:xfrm>
             <a:off x="566928" y="3200400"/>
-            <a:ext cx="4882896" cy="896112"/>
+            <a:ext cx="4436872" cy="896112"/>
           </a:xfrm>
           <a:prstGeom prst="roundRect">
             <a:avLst>
@@ -6577,7 +6575,7 @@
         <p:spPr>
           <a:xfrm>
             <a:off x="566928" y="4242816"/>
-            <a:ext cx="5577840" cy="896112"/>
+            <a:ext cx="3903472" cy="896112"/>
           </a:xfrm>
           <a:prstGeom prst="roundRect">
             <a:avLst>
@@ -6760,7 +6758,7 @@
       </p:sp>
       <p:pic>
         <p:nvPicPr>
-          <p:cNvPr id="17" name="Image 0" descr="D:/Projects/batboda/발표/캡처/20260805_C10_최근관측_관측소거리.png"/>
+          <p:cNvPr id="18" name="Image 1" descr="D:/Projects/batboda/발표/캡처/20260805_C11_현재판정방식.png"/>
           <p:cNvPicPr>
             <a:picLocks noChangeAspect="1"/>
           </p:cNvPicPr>
@@ -6774,17 +6772,62 @@
         </p:blipFill>
         <p:spPr>
           <a:xfrm>
-            <a:off x="7461504" y="2597970"/>
-            <a:ext cx="4169664" cy="692796"/>
+            <a:off x="5595334" y="1601893"/>
+            <a:ext cx="6029433" cy="2549483"/>
           </a:xfrm>
           <a:prstGeom prst="rect">
             <a:avLst/>
           </a:prstGeom>
         </p:spPr>
       </p:pic>
+      <p:sp>
+        <p:nvSpPr>
+          <p:cNvPr id="19" name="Text 15"/>
+          <p:cNvSpPr/>
+          <p:nvPr/>
+        </p:nvSpPr>
+        <p:spPr>
+          <a:xfrm>
+            <a:off x="10984687" y="6291072"/>
+            <a:ext cx="640080" cy="274320"/>
+          </a:xfrm>
+          <a:prstGeom prst="rect">
+            <a:avLst/>
+          </a:prstGeom>
+          <a:noFill/>
+          <a:ln/>
+        </p:spPr>
+        <p:txBody>
+          <a:bodyPr wrap="square" lIns="0" tIns="0" rIns="0" bIns="0" rtlCol="0" anchor="ctr"/>
+          <a:lstStyle/>
+          <a:p>
+            <a:pPr marL="0" indent="0" algn="r">
+              <a:buNone/>
+            </a:pPr>
+            <a:r>
+              <a:rPr lang="en-US" sz="1100" b="1" dirty="0">
+                <a:solidFill>
+                  <a:srgbClr val="B9C4C7"/>
+                </a:solidFill>
+                <a:latin typeface="맑은 고딕" pitchFamily="34" charset="0"/>
+                <a:ea typeface="맑은 고딕" pitchFamily="34" charset="-122"/>
+                <a:cs typeface="맑은 고딕" pitchFamily="34" charset="-120"/>
+              </a:rPr>
+              <a:t>08</a:t>
+            </a:r>
+            <a:endParaRPr lang="en-US" sz="1100" dirty="0"/>
+          </a:p>
+        </p:txBody>
+      </p:sp>
       <p:pic>
         <p:nvPicPr>
-          <p:cNvPr id="18" name="Image 1" descr="D:/Projects/batboda/발표/캡처/20260805_C11_현재판정방식.png"/>
+          <p:cNvPr id="21" name="Image 0" descr="D:/Projects/batboda/발표/캡처/20260805_C10_최근관측_관측소거리.png">
+            <a:extLst>
+              <a:ext uri="{FF2B5EF4-FFF2-40B4-BE49-F238E27FC236}">
+                <a16:creationId xmlns:a16="http://schemas.microsoft.com/office/drawing/2014/main" id="{73994124-3F0F-59AA-68D3-483AA3E04DD5}"/>
+              </a:ext>
+            </a:extLst>
+          </p:cNvPr>
           <p:cNvPicPr>
             <a:picLocks noChangeAspect="1"/>
           </p:cNvPicPr>
@@ -6798,53 +6841,14 @@
         </p:blipFill>
         <p:spPr>
           <a:xfrm>
-            <a:off x="7461504" y="3882475"/>
-            <a:ext cx="4169664" cy="1763099"/>
+            <a:off x="4791456" y="4123325"/>
+            <a:ext cx="6817765" cy="1132782"/>
           </a:xfrm>
           <a:prstGeom prst="rect">
             <a:avLst/>
           </a:prstGeom>
         </p:spPr>
       </p:pic>
-      <p:sp>
-        <p:nvSpPr>
-          <p:cNvPr id="19" name="Text 15"/>
-          <p:cNvSpPr/>
-          <p:nvPr/>
-        </p:nvSpPr>
-        <p:spPr>
-          <a:xfrm>
-            <a:off x="10984687" y="6291072"/>
-            <a:ext cx="640080" cy="274320"/>
-          </a:xfrm>
-          <a:prstGeom prst="rect">
-            <a:avLst/>
-          </a:prstGeom>
-          <a:noFill/>
-          <a:ln/>
-        </p:spPr>
-        <p:txBody>
-          <a:bodyPr wrap="square" lIns="0" tIns="0" rIns="0" bIns="0" rtlCol="0" anchor="ctr"/>
-          <a:lstStyle/>
-          <a:p>
-            <a:pPr marL="0" indent="0" algn="r">
-              <a:buNone/>
-            </a:pPr>
-            <a:r>
-              <a:rPr lang="en-US" sz="1100" b="1" dirty="0">
-                <a:solidFill>
-                  <a:srgbClr val="B9C4C7"/>
-                </a:solidFill>
-                <a:latin typeface="맑은 고딕" pitchFamily="34" charset="0"/>
-                <a:ea typeface="맑은 고딕" pitchFamily="34" charset="-122"/>
-                <a:cs typeface="맑은 고딕" pitchFamily="34" charset="-120"/>
-              </a:rPr>
-              <a:t>08</a:t>
-            </a:r>
-            <a:endParaRPr lang="en-US" sz="1100" dirty="0"/>
-          </a:p>
-        </p:txBody>
-      </p:sp>
     </p:spTree>
   </p:cSld>
   <p:clrMapOvr>
@@ -6948,8 +6952,8 @@
         </p:nvSpPr>
         <p:spPr>
           <a:xfrm>
-            <a:off x="566928" y="3858768"/>
-            <a:ext cx="1847088" cy="420624"/>
+            <a:off x="566928" y="3357974"/>
+            <a:ext cx="1847088" cy="921418"/>
           </a:xfrm>
           <a:prstGeom prst="roundRect">
             <a:avLst>
@@ -6982,8 +6986,8 @@
         </p:nvSpPr>
         <p:spPr>
           <a:xfrm>
-            <a:off x="566928" y="3858768"/>
-            <a:ext cx="1847088" cy="420624"/>
+            <a:off x="566928" y="3357974"/>
+            <a:ext cx="1847088" cy="921418"/>
           </a:xfrm>
           <a:prstGeom prst="rect">
             <a:avLst/>
@@ -6999,7 +7003,7 @@
               <a:buNone/>
             </a:pPr>
             <a:r>
-              <a:rPr lang="en-US" sz="1700" b="1" dirty="0">
+              <a:rPr lang="en-US" sz="3600" b="1" dirty="0">
                 <a:solidFill>
                   <a:srgbClr val="FFFFFF"/>
                 </a:solidFill>
@@ -7009,7 +7013,7 @@
               </a:rPr>
               <a:t>밭보다</a:t>
             </a:r>
-            <a:endParaRPr lang="en-US" sz="1700" dirty="0"/>
+            <a:endParaRPr lang="en-US" sz="3600" dirty="0"/>
           </a:p>
         </p:txBody>
       </p:sp>
@@ -7021,7 +7025,7 @@
         </p:nvSpPr>
         <p:spPr>
           <a:xfrm>
-            <a:off x="2615184" y="3858768"/>
+            <a:off x="2615184" y="3608371"/>
             <a:ext cx="4023360" cy="420624"/>
           </a:xfrm>
           <a:prstGeom prst="rect">
@@ -7077,7 +7081,7 @@
               <a:buNone/>
             </a:pPr>
             <a:r>
-              <a:rPr lang="en-US" sz="1500" dirty="0">
+              <a:rPr lang="en-US" sz="2000" dirty="0">
                 <a:solidFill>
                   <a:srgbClr val="A7C0C8"/>
                 </a:solidFill>
@@ -7087,7 +7091,7 @@
               </a:rPr>
               <a:t>지금 열어 보실 수 있습니다.</a:t>
             </a:r>
-            <a:endParaRPr lang="en-US" sz="1500" dirty="0"/>
+            <a:endParaRPr lang="en-US" sz="2000" dirty="0"/>
           </a:p>
         </p:txBody>
       </p:sp>
@@ -7107,7 +7111,7 @@
         </p:blipFill>
         <p:spPr>
           <a:xfrm>
-            <a:off x="7187184" y="1481328"/>
+            <a:off x="7551251" y="617728"/>
             <a:ext cx="2103120" cy="2103120"/>
           </a:xfrm>
           <a:prstGeom prst="rect">
@@ -7131,8 +7135,8 @@
         </p:blipFill>
         <p:spPr>
           <a:xfrm>
-            <a:off x="9528048" y="1941236"/>
-            <a:ext cx="2103120" cy="1183304"/>
+            <a:off x="5681134" y="3118445"/>
+            <a:ext cx="5638800" cy="3172627"/>
           </a:xfrm>
           <a:prstGeom prst="rect">
             <a:avLst/>
